--- a/wifi_router.pptx
+++ b/wifi_router.pptx
@@ -8,7 +8,7 @@
     <p:notesMasterId r:id="rId3"/>
   </p:notesMasterIdLst>
   <p:sldIdLst>
-    <p:sldId id="256" r:id="rId2"/>
+    <p:sldId id="257" r:id="rId2"/>
   </p:sldIdLst>
   <p:sldSz cx="9144000" cy="5143500" type="screen16x9"/>
   <p:notesSz cx="6858000" cy="9144000"/>
@@ -702,7 +702,7 @@
           <a:lstStyle/>
           <a:p>
             <a:fld id="{72FF4884-D800-C04E-BD57-A34AD4860084}" type="datetimeFigureOut">
-              <a:t>6/4/22</a:t>
+              <a:t>10/12/22</a:t>
             </a:fld>
             <a:endParaRPr lang="en-US"/>
           </a:p>
@@ -909,7 +909,7 @@
           <a:lstStyle/>
           <a:p>
             <a:fld id="{72FF4884-D800-C04E-BD57-A34AD4860084}" type="datetimeFigureOut">
-              <a:t>6/4/22</a:t>
+              <a:t>10/12/22</a:t>
             </a:fld>
             <a:endParaRPr lang="en-US"/>
           </a:p>
@@ -1126,7 +1126,7 @@
           <a:lstStyle/>
           <a:p>
             <a:fld id="{72FF4884-D800-C04E-BD57-A34AD4860084}" type="datetimeFigureOut">
-              <a:t>6/4/22</a:t>
+              <a:t>10/12/22</a:t>
             </a:fld>
             <a:endParaRPr lang="en-US"/>
           </a:p>
@@ -1333,7 +1333,7 @@
           <a:lstStyle/>
           <a:p>
             <a:fld id="{72FF4884-D800-C04E-BD57-A34AD4860084}" type="datetimeFigureOut">
-              <a:t>6/4/22</a:t>
+              <a:t>10/12/22</a:t>
             </a:fld>
             <a:endParaRPr lang="en-US"/>
           </a:p>
@@ -1617,7 +1617,7 @@
           <a:lstStyle/>
           <a:p>
             <a:fld id="{72FF4884-D800-C04E-BD57-A34AD4860084}" type="datetimeFigureOut">
-              <a:t>6/4/22</a:t>
+              <a:t>10/12/22</a:t>
             </a:fld>
             <a:endParaRPr lang="en-US"/>
           </a:p>
@@ -1891,7 +1891,7 @@
           <a:lstStyle/>
           <a:p>
             <a:fld id="{72FF4884-D800-C04E-BD57-A34AD4860084}" type="datetimeFigureOut">
-              <a:t>6/4/22</a:t>
+              <a:t>10/12/22</a:t>
             </a:fld>
             <a:endParaRPr lang="en-US"/>
           </a:p>
@@ -2312,7 +2312,7 @@
           <a:lstStyle/>
           <a:p>
             <a:fld id="{72FF4884-D800-C04E-BD57-A34AD4860084}" type="datetimeFigureOut">
-              <a:t>6/4/22</a:t>
+              <a:t>10/12/22</a:t>
             </a:fld>
             <a:endParaRPr lang="en-US"/>
           </a:p>
@@ -2462,7 +2462,7 @@
           <a:lstStyle/>
           <a:p>
             <a:fld id="{72FF4884-D800-C04E-BD57-A34AD4860084}" type="datetimeFigureOut">
-              <a:t>6/4/22</a:t>
+              <a:t>10/12/22</a:t>
             </a:fld>
             <a:endParaRPr lang="en-US"/>
           </a:p>
@@ -2584,7 +2584,7 @@
           <a:lstStyle/>
           <a:p>
             <a:fld id="{72FF4884-D800-C04E-BD57-A34AD4860084}" type="datetimeFigureOut">
-              <a:t>6/4/22</a:t>
+              <a:t>10/12/22</a:t>
             </a:fld>
             <a:endParaRPr lang="en-US"/>
           </a:p>
@@ -2903,7 +2903,7 @@
           <a:lstStyle/>
           <a:p>
             <a:fld id="{72FF4884-D800-C04E-BD57-A34AD4860084}" type="datetimeFigureOut">
-              <a:t>6/4/22</a:t>
+              <a:t>10/12/22</a:t>
             </a:fld>
             <a:endParaRPr lang="en-US"/>
           </a:p>
@@ -3200,7 +3200,7 @@
           <a:lstStyle/>
           <a:p>
             <a:fld id="{72FF4884-D800-C04E-BD57-A34AD4860084}" type="datetimeFigureOut">
-              <a:t>6/4/22</a:t>
+              <a:t>10/12/22</a:t>
             </a:fld>
             <a:endParaRPr lang="en-US"/>
           </a:p>
@@ -3450,7 +3450,7 @@
           </a:lstStyle>
           <a:p>
             <a:fld id="{72FF4884-D800-C04E-BD57-A34AD4860084}" type="datetimeFigureOut">
-              <a:t>6/4/22</a:t>
+              <a:t>10/12/22</a:t>
             </a:fld>
             <a:endParaRPr lang="en-US"/>
           </a:p>
@@ -3914,10 +3914,10 @@
       </p:sp>
       <p:sp>
         <p:nvSpPr>
-          <p:cNvPr id="3" name="TextBox 2">
-            <a:extLst>
-              <a:ext uri="{FF2B5EF4-FFF2-40B4-BE49-F238E27FC236}">
-                <a16:creationId xmlns:a16="http://schemas.microsoft.com/office/drawing/2014/main" id="{54580469-110B-C27E-BEDC-3150F4CF982D}"/>
+          <p:cNvPr id="6" name="TextBox 5">
+            <a:extLst>
+              <a:ext uri="{FF2B5EF4-FFF2-40B4-BE49-F238E27FC236}">
+                <a16:creationId xmlns:a16="http://schemas.microsoft.com/office/drawing/2014/main" id="{0B3D246B-C6D4-845C-1A20-2ADB2087AB1D}"/>
               </a:ext>
             </a:extLst>
           </p:cNvPr>
@@ -3926,8 +3926,8 @@
         </p:nvSpPr>
         <p:spPr>
           <a:xfrm>
-            <a:off x="5816338" y="3078401"/>
-            <a:ext cx="2036190" cy="738664"/>
+            <a:off x="377228" y="3065700"/>
+            <a:ext cx="3306838" cy="1169551"/>
           </a:xfrm>
           <a:prstGeom prst="rect">
             <a:avLst/>
@@ -3943,323 +3943,55 @@
             <a:pPr algn="ctr"/>
             <a:r>
               <a:rPr lang="en-US" sz="1400"/>
-              <a:t>TP-Link AC5400</a:t>
+              <a:t>TP-Link Archer AX11000</a:t>
             </a:r>
             <a:br>
               <a:rPr lang="en-US" sz="1400"/>
             </a:br>
             <a:r>
               <a:rPr lang="en-US" sz="1400"/>
-              <a:t>$300</a:t>
+              <a:t>$230 at amazon (October 2022)</a:t>
             </a:r>
           </a:p>
           <a:p>
             <a:pPr algn="ctr"/>
             <a:r>
               <a:rPr lang="en-US" sz="1400"/>
-              <a:t>(since 2016)</a:t>
-            </a:r>
-          </a:p>
-        </p:txBody>
-      </p:sp>
-      <p:pic>
-        <p:nvPicPr>
-          <p:cNvPr id="4" name="Picture 3">
-            <a:extLst>
-              <a:ext uri="{FF2B5EF4-FFF2-40B4-BE49-F238E27FC236}">
-                <a16:creationId xmlns:a16="http://schemas.microsoft.com/office/drawing/2014/main" id="{5F91EE9A-D75E-2996-CFD1-9FEDF04813CC}"/>
-              </a:ext>
-            </a:extLst>
-          </p:cNvPr>
-          <p:cNvPicPr>
-            <a:picLocks noChangeAspect="1"/>
-          </p:cNvPicPr>
+              <a:t>It has the WDS (WiFi Distribution System)</a:t>
+            </a:r>
+          </a:p>
+          <a:p>
+            <a:pPr algn="ctr"/>
+            <a:r>
+              <a:rPr lang="en-US" sz="1400"/>
+              <a:t>which allows to "chain" two routers </a:t>
+            </a:r>
+          </a:p>
+          <a:p>
+            <a:pPr algn="ctr"/>
+            <a:r>
+              <a:rPr lang="en-US" sz="1400"/>
+              <a:t>for longer reach</a:t>
+            </a:r>
+          </a:p>
+        </p:txBody>
+      </p:sp>
+      <p:sp>
+        <p:nvSpPr>
+          <p:cNvPr id="9" name="TextBox 8">
+            <a:extLst>
+              <a:ext uri="{FF2B5EF4-FFF2-40B4-BE49-F238E27FC236}">
+                <a16:creationId xmlns:a16="http://schemas.microsoft.com/office/drawing/2014/main" id="{6944FC02-A1CE-DF86-40B3-21BDDA52CFE0}"/>
+              </a:ext>
+            </a:extLst>
+          </p:cNvPr>
+          <p:cNvSpPr txBox="1"/>
           <p:nvPr/>
-        </p:nvPicPr>
-        <p:blipFill>
-          <a:blip r:embed="rId2" cstate="email">
-            <a:extLst>
-              <a:ext uri="{28A0092B-C50C-407E-A947-70E740481C1C}">
-                <a14:useLocalDpi xmlns:a14="http://schemas.microsoft.com/office/drawing/2010/main"/>
-              </a:ext>
-            </a:extLst>
-          </a:blip>
-          <a:stretch>
-            <a:fillRect/>
-          </a:stretch>
-        </p:blipFill>
+        </p:nvSpPr>
         <p:spPr>
           <a:xfrm>
-            <a:off x="5936481" y="1674544"/>
-            <a:ext cx="1527113" cy="1191365"/>
-          </a:xfrm>
-          <a:prstGeom prst="rect">
-            <a:avLst/>
-          </a:prstGeom>
-        </p:spPr>
-      </p:pic>
-      <p:sp>
-        <p:nvSpPr>
-          <p:cNvPr id="6" name="TextBox 5">
-            <a:extLst>
-              <a:ext uri="{FF2B5EF4-FFF2-40B4-BE49-F238E27FC236}">
-                <a16:creationId xmlns:a16="http://schemas.microsoft.com/office/drawing/2014/main" id="{0B3D246B-C6D4-845C-1A20-2ADB2087AB1D}"/>
-              </a:ext>
-            </a:extLst>
-          </p:cNvPr>
-          <p:cNvSpPr txBox="1"/>
-          <p:nvPr/>
-        </p:nvSpPr>
-        <p:spPr>
-          <a:xfrm>
-            <a:off x="874257" y="3078402"/>
-            <a:ext cx="2269702" cy="738664"/>
-          </a:xfrm>
-          <a:prstGeom prst="rect">
-            <a:avLst/>
-          </a:prstGeom>
-          <a:noFill/>
-        </p:spPr>
-        <p:txBody>
-          <a:bodyPr wrap="square" rtlCol="0">
-            <a:spAutoFit/>
-          </a:bodyPr>
-          <a:lstStyle/>
-          <a:p>
-            <a:pPr algn="ctr"/>
-            <a:r>
-              <a:rPr lang="en-US" sz="1400"/>
-              <a:t>TP-Link AX11000</a:t>
-            </a:r>
-            <a:br>
-              <a:rPr lang="en-US" sz="1400"/>
-            </a:br>
-            <a:r>
-              <a:rPr lang="en-US" sz="1400"/>
-              <a:t>$300</a:t>
-            </a:r>
-            <a:br>
-              <a:rPr lang="en-US" sz="1400"/>
-            </a:br>
-            <a:r>
-              <a:rPr lang="en-US" sz="1400" b="1">
-                <a:solidFill>
-                  <a:srgbClr val="00B050"/>
-                </a:solidFill>
-              </a:rPr>
-              <a:t>$220 at Costco</a:t>
-            </a:r>
-          </a:p>
-        </p:txBody>
-      </p:sp>
-      <p:sp>
-        <p:nvSpPr>
-          <p:cNvPr id="7" name="TextBox 6">
-            <a:extLst>
-              <a:ext uri="{FF2B5EF4-FFF2-40B4-BE49-F238E27FC236}">
-                <a16:creationId xmlns:a16="http://schemas.microsoft.com/office/drawing/2014/main" id="{13A8DAA7-3755-6D52-4765-AA3A149D30D0}"/>
-              </a:ext>
-            </a:extLst>
-          </p:cNvPr>
-          <p:cNvSpPr txBox="1"/>
-          <p:nvPr/>
-        </p:nvSpPr>
-        <p:spPr>
-          <a:xfrm>
-            <a:off x="3345039" y="3078402"/>
-            <a:ext cx="2036190" cy="523220"/>
-          </a:xfrm>
-          <a:prstGeom prst="rect">
-            <a:avLst/>
-          </a:prstGeom>
-          <a:noFill/>
-        </p:spPr>
-        <p:txBody>
-          <a:bodyPr wrap="square" rtlCol="0">
-            <a:spAutoFit/>
-          </a:bodyPr>
-          <a:lstStyle/>
-          <a:p>
-            <a:pPr algn="ctr"/>
-            <a:r>
-              <a:rPr lang="en-US" sz="1400"/>
-              <a:t>TP-Link AX6000</a:t>
-            </a:r>
-          </a:p>
-          <a:p>
-            <a:pPr algn="ctr"/>
-            <a:r>
-              <a:rPr lang="en-US" sz="1400"/>
-              <a:t>$262</a:t>
-            </a:r>
-          </a:p>
-        </p:txBody>
-      </p:sp>
-      <p:pic>
-        <p:nvPicPr>
-          <p:cNvPr id="8" name="Picture 7">
-            <a:extLst>
-              <a:ext uri="{FF2B5EF4-FFF2-40B4-BE49-F238E27FC236}">
-                <a16:creationId xmlns:a16="http://schemas.microsoft.com/office/drawing/2014/main" id="{E567B5EF-FA61-316D-8860-A7A586C92637}"/>
-              </a:ext>
-            </a:extLst>
-          </p:cNvPr>
-          <p:cNvPicPr>
-            <a:picLocks noChangeAspect="1"/>
-          </p:cNvPicPr>
-          <p:nvPr/>
-        </p:nvPicPr>
-        <p:blipFill>
-          <a:blip r:embed="rId3" cstate="email">
-            <a:extLst>
-              <a:ext uri="{28A0092B-C50C-407E-A947-70E740481C1C}">
-                <a14:useLocalDpi xmlns:a14="http://schemas.microsoft.com/office/drawing/2010/main"/>
-              </a:ext>
-            </a:extLst>
-          </a:blip>
-          <a:stretch>
-            <a:fillRect/>
-          </a:stretch>
-        </p:blipFill>
-        <p:spPr>
-          <a:xfrm>
-            <a:off x="3606585" y="1677343"/>
-            <a:ext cx="1685238" cy="1160735"/>
-          </a:xfrm>
-          <a:prstGeom prst="rect">
-            <a:avLst/>
-          </a:prstGeom>
-        </p:spPr>
-      </p:pic>
-      <p:sp>
-        <p:nvSpPr>
-          <p:cNvPr id="9" name="TextBox 8">
-            <a:extLst>
-              <a:ext uri="{FF2B5EF4-FFF2-40B4-BE49-F238E27FC236}">
-                <a16:creationId xmlns:a16="http://schemas.microsoft.com/office/drawing/2014/main" id="{6944FC02-A1CE-DF86-40B3-21BDDA52CFE0}"/>
-              </a:ext>
-            </a:extLst>
-          </p:cNvPr>
-          <p:cNvSpPr txBox="1"/>
-          <p:nvPr/>
-        </p:nvSpPr>
-        <p:spPr>
-          <a:xfrm>
-            <a:off x="3074097" y="261610"/>
-            <a:ext cx="3760336" cy="276999"/>
-          </a:xfrm>
-          <a:prstGeom prst="rect">
-            <a:avLst/>
-          </a:prstGeom>
-          <a:noFill/>
-        </p:spPr>
-        <p:txBody>
-          <a:bodyPr wrap="square" rtlCol="0">
-            <a:spAutoFit/>
-          </a:bodyPr>
-          <a:lstStyle/>
-          <a:p>
-            <a:r>
-              <a:rPr lang="en-US" sz="1200">
-                <a:hlinkClick r:id="rId4"/>
-              </a:rPr>
-              <a:t>https://www.tp-link.com/us/explore/wifi-router/</a:t>
-            </a:r>
-            <a:endParaRPr lang="en-US" sz="1200"/>
-          </a:p>
-        </p:txBody>
-      </p:sp>
-      <p:pic>
-        <p:nvPicPr>
-          <p:cNvPr id="10" name="Picture 9">
-            <a:extLst>
-              <a:ext uri="{FF2B5EF4-FFF2-40B4-BE49-F238E27FC236}">
-                <a16:creationId xmlns:a16="http://schemas.microsoft.com/office/drawing/2014/main" id="{A79F21E5-9F3F-4513-6B8D-A194EC2E431F}"/>
-              </a:ext>
-            </a:extLst>
-          </p:cNvPr>
-          <p:cNvPicPr>
-            <a:picLocks noChangeAspect="1"/>
-          </p:cNvPicPr>
-          <p:nvPr/>
-        </p:nvPicPr>
-        <p:blipFill>
-          <a:blip r:embed="rId5" cstate="email">
-            <a:extLst>
-              <a:ext uri="{28A0092B-C50C-407E-A947-70E740481C1C}">
-                <a14:useLocalDpi xmlns:a14="http://schemas.microsoft.com/office/drawing/2010/main"/>
-              </a:ext>
-            </a:extLst>
-          </a:blip>
-          <a:stretch>
-            <a:fillRect/>
-          </a:stretch>
-        </p:blipFill>
-        <p:spPr>
-          <a:xfrm>
-            <a:off x="1099369" y="1527788"/>
-            <a:ext cx="1862558" cy="1459843"/>
-          </a:xfrm>
-          <a:prstGeom prst="rect">
-            <a:avLst/>
-          </a:prstGeom>
-        </p:spPr>
-      </p:pic>
-      <p:sp>
-        <p:nvSpPr>
-          <p:cNvPr id="11" name="TextBox 10">
-            <a:extLst>
-              <a:ext uri="{FF2B5EF4-FFF2-40B4-BE49-F238E27FC236}">
-                <a16:creationId xmlns:a16="http://schemas.microsoft.com/office/drawing/2014/main" id="{FCA20030-5E2A-A57A-C189-373BBFD7B587}"/>
-              </a:ext>
-            </a:extLst>
-          </p:cNvPr>
-          <p:cNvSpPr txBox="1"/>
-          <p:nvPr/>
-        </p:nvSpPr>
-        <p:spPr>
-          <a:xfrm>
-            <a:off x="0" y="634246"/>
-            <a:ext cx="2579244" cy="369332"/>
-          </a:xfrm>
-          <a:prstGeom prst="rect">
-            <a:avLst/>
-          </a:prstGeom>
-          <a:noFill/>
-        </p:spPr>
-        <p:txBody>
-          <a:bodyPr wrap="square" rtlCol="0">
-            <a:spAutoFit/>
-          </a:bodyPr>
-          <a:lstStyle/>
-          <a:p>
-            <a:r>
-              <a:rPr lang="en-US" b="1">
-                <a:solidFill>
-                  <a:srgbClr val="00B050"/>
-                </a:solidFill>
-              </a:rPr>
-              <a:t>TP-Link Archer Routers</a:t>
-            </a:r>
-          </a:p>
-        </p:txBody>
-      </p:sp>
-      <p:sp>
-        <p:nvSpPr>
-          <p:cNvPr id="12" name="TextBox 11">
-            <a:extLst>
-              <a:ext uri="{FF2B5EF4-FFF2-40B4-BE49-F238E27FC236}">
-                <a16:creationId xmlns:a16="http://schemas.microsoft.com/office/drawing/2014/main" id="{ECC1AC79-F855-771E-2772-A3515C78579E}"/>
-              </a:ext>
-            </a:extLst>
-          </p:cNvPr>
-          <p:cNvSpPr txBox="1"/>
-          <p:nvPr/>
-        </p:nvSpPr>
-        <p:spPr>
-          <a:xfrm>
-            <a:off x="1644774" y="4032200"/>
-            <a:ext cx="5436720" cy="954107"/>
+            <a:off x="3983603" y="818912"/>
+            <a:ext cx="4937760" cy="3600986"/>
           </a:xfrm>
           <a:prstGeom prst="rect">
             <a:avLst/>
@@ -4283,36 +4015,123 @@
           <a:lstStyle/>
           <a:p>
             <a:r>
-              <a:rPr lang="en-US" sz="1400"/>
+              <a:rPr lang="en-US" sz="1200"/>
+              <a:t>More Routers:</a:t>
+            </a:r>
+            <a:endParaRPr lang="en-US" sz="1200">
+              <a:hlinkClick r:id="rId2"/>
+            </a:endParaRPr>
+          </a:p>
+          <a:p>
+            <a:r>
+              <a:rPr lang="en-US" sz="1200">
+                <a:hlinkClick r:id="rId2"/>
+              </a:rPr>
+              <a:t>https://www.tp-link.com/us/explore/wifi-router/</a:t>
+            </a:r>
+            <a:r>
+              <a:rPr lang="en-US" sz="1200"/>
+              <a:t>. </a:t>
+            </a:r>
+          </a:p>
+          <a:p>
+            <a:endParaRPr lang="en-US" sz="1200"/>
+          </a:p>
+          <a:p>
+            <a:r>
+              <a:rPr lang="en-US" sz="1200"/>
               <a:t>Note:</a:t>
             </a:r>
           </a:p>
           <a:p>
             <a:r>
-              <a:rPr lang="en-US" sz="1400"/>
+              <a:rPr lang="en-US" sz="1200"/>
               <a:t>Some routers may lack certain features.</a:t>
             </a:r>
           </a:p>
           <a:p>
             <a:r>
-              <a:rPr lang="en-US" sz="1400"/>
-              <a:t>For example, AX6600 doesn't have WDS (WiFi Distribution System).</a:t>
-            </a:r>
-          </a:p>
-          <a:p>
-            <a:r>
-              <a:rPr lang="en-US" sz="1400"/>
-              <a:t>Download the manual and check the features before buying the router.</a:t>
-            </a:r>
-          </a:p>
-        </p:txBody>
-      </p:sp>
-      <p:sp>
-        <p:nvSpPr>
-          <p:cNvPr id="13" name="TextBox 12">
-            <a:extLst>
-              <a:ext uri="{FF2B5EF4-FFF2-40B4-BE49-F238E27FC236}">
-                <a16:creationId xmlns:a16="http://schemas.microsoft.com/office/drawing/2014/main" id="{42F5C051-A47D-EB26-B466-5FA2AC3707F0}"/>
+              <a:rPr lang="en-US" sz="1200"/>
+              <a:t>For example, Archer GX90 has faster/better speed specifications (AX6600). But ... it doesn't have WDS (WiFi Distribution System).</a:t>
+            </a:r>
+          </a:p>
+          <a:p>
+            <a:endParaRPr lang="en-US" sz="1200"/>
+          </a:p>
+          <a:p>
+            <a:r>
+              <a:rPr lang="en-US" sz="1200"/>
+              <a:t>Before buying a router I recommend to use the link below to chat (via text) with TP-Link support. I just did that. As of today (October 2022) the Archer AX11000 is the most advanced router which has WDS.</a:t>
+            </a:r>
+          </a:p>
+          <a:p>
+            <a:endParaRPr lang="en-US" sz="1200"/>
+          </a:p>
+          <a:p>
+            <a:r>
+              <a:rPr lang="en-US" sz="1200"/>
+              <a:t>Also note that for some routers (for example, Archer AX11000) its name and its speed specification is the same. But for others they are different.</a:t>
+            </a:r>
+          </a:p>
+          <a:p>
+            <a:r>
+              <a:rPr lang="en-US" sz="1200"/>
+              <a:t>For example, Archer AX90 and Archer GX90 both have AX6600.</a:t>
+            </a:r>
+          </a:p>
+          <a:p>
+            <a:endParaRPr lang="en-US" sz="1200"/>
+          </a:p>
+          <a:p>
+            <a:r>
+              <a:rPr lang="en-US" sz="1200"/>
+              <a:t>Also I recommend you to search and download the PDF manual for the router you want to buy BEFORE BUYING it. So that you can read the installation instructions (for example, to see how to configure the WDS).</a:t>
+            </a:r>
+          </a:p>
+        </p:txBody>
+      </p:sp>
+      <p:pic>
+        <p:nvPicPr>
+          <p:cNvPr id="10" name="Picture 9">
+            <a:extLst>
+              <a:ext uri="{FF2B5EF4-FFF2-40B4-BE49-F238E27FC236}">
+                <a16:creationId xmlns:a16="http://schemas.microsoft.com/office/drawing/2014/main" id="{A79F21E5-9F3F-4513-6B8D-A194EC2E431F}"/>
+              </a:ext>
+            </a:extLst>
+          </p:cNvPr>
+          <p:cNvPicPr>
+            <a:picLocks noChangeAspect="1"/>
+          </p:cNvPicPr>
+          <p:nvPr/>
+        </p:nvPicPr>
+        <p:blipFill>
+          <a:blip r:embed="rId3" cstate="email">
+            <a:extLst>
+              <a:ext uri="{28A0092B-C50C-407E-A947-70E740481C1C}">
+                <a14:useLocalDpi xmlns:a14="http://schemas.microsoft.com/office/drawing/2010/main"/>
+              </a:ext>
+            </a:extLst>
+          </a:blip>
+          <a:stretch>
+            <a:fillRect/>
+          </a:stretch>
+        </p:blipFill>
+        <p:spPr>
+          <a:xfrm>
+            <a:off x="1099369" y="1527788"/>
+            <a:ext cx="1862558" cy="1459843"/>
+          </a:xfrm>
+          <a:prstGeom prst="rect">
+            <a:avLst/>
+          </a:prstGeom>
+        </p:spPr>
+      </p:pic>
+      <p:sp>
+        <p:nvSpPr>
+          <p:cNvPr id="11" name="TextBox 10">
+            <a:extLst>
+              <a:ext uri="{FF2B5EF4-FFF2-40B4-BE49-F238E27FC236}">
+                <a16:creationId xmlns:a16="http://schemas.microsoft.com/office/drawing/2014/main" id="{FCA20030-5E2A-A57A-C189-373BBFD7B587}"/>
               </a:ext>
             </a:extLst>
           </p:cNvPr>
@@ -4321,8 +4140,8 @@
         </p:nvSpPr>
         <p:spPr>
           <a:xfrm>
-            <a:off x="2175641" y="1175334"/>
-            <a:ext cx="630621" cy="369332"/>
+            <a:off x="0" y="634246"/>
+            <a:ext cx="2579244" cy="369332"/>
           </a:xfrm>
           <a:prstGeom prst="rect">
             <a:avLst/>
@@ -4338,10 +4157,50 @@
             <a:r>
               <a:rPr lang="en-US" b="1">
                 <a:solidFill>
+                  <a:srgbClr val="00B050"/>
+                </a:solidFill>
+              </a:rPr>
+              <a:t>TP-Link Archer Routers</a:t>
+            </a:r>
+          </a:p>
+        </p:txBody>
+      </p:sp>
+      <p:sp>
+        <p:nvSpPr>
+          <p:cNvPr id="13" name="TextBox 12">
+            <a:extLst>
+              <a:ext uri="{FF2B5EF4-FFF2-40B4-BE49-F238E27FC236}">
+                <a16:creationId xmlns:a16="http://schemas.microsoft.com/office/drawing/2014/main" id="{42F5C051-A47D-EB26-B466-5FA2AC3707F0}"/>
+              </a:ext>
+            </a:extLst>
+          </p:cNvPr>
+          <p:cNvSpPr txBox="1"/>
+          <p:nvPr/>
+        </p:nvSpPr>
+        <p:spPr>
+          <a:xfrm>
+            <a:off x="591546" y="1123693"/>
+            <a:ext cx="2878203" cy="369332"/>
+          </a:xfrm>
+          <a:prstGeom prst="rect">
+            <a:avLst/>
+          </a:prstGeom>
+          <a:noFill/>
+        </p:spPr>
+        <p:txBody>
+          <a:bodyPr wrap="square" rtlCol="0">
+            <a:spAutoFit/>
+          </a:bodyPr>
+          <a:lstStyle/>
+          <a:p>
+            <a:pPr algn="ctr"/>
+            <a:r>
+              <a:rPr lang="en-US" b="1">
+                <a:solidFill>
                   <a:srgbClr val="FF0000"/>
                 </a:solidFill>
               </a:rPr>
-              <a:t>Best</a:t>
+              <a:t>Best (Summer-Fall 2022)</a:t>
             </a:r>
           </a:p>
         </p:txBody>
@@ -4349,7 +4208,7 @@
     </p:spTree>
     <p:extLst>
       <p:ext uri="{BB962C8B-B14F-4D97-AF65-F5344CB8AC3E}">
-        <p14:creationId xmlns:p14="http://schemas.microsoft.com/office/powerpoint/2010/main" val="841536658"/>
+        <p14:creationId xmlns:p14="http://schemas.microsoft.com/office/powerpoint/2010/main" val="4291502968"/>
       </p:ext>
     </p:extLst>
   </p:cSld>
